--- a/slides/Module_04_SDD_PRDs.pptx
+++ b/slides/Module_04_SDD_PRDs.pptx
@@ -2897,7 +2897,7 @@
                   <a:srgbClr val="1C3557"/>
                 </a:solidFill>
               </a:rPr>
-              <a:t>PRD as a compliance artefact</a:t>
+              <a:t>PRD as a compliance artifact</a:t>
             </a:r>
             <a:endParaRPr lang="en-US" sz="1250" dirty="0"/>
           </a:p>
@@ -4692,7 +4692,7 @@
                   <a:srgbClr val="D4E4F0"/>
                 </a:solidFill>
               </a:rPr>
-              <a:t>· PRD is a compliance artefact in regulated envs</a:t>
+              <a:t>· PRD is a compliance artifact in regulated envs</a:t>
             </a:r>
             <a:endParaRPr lang="en-US" sz="1150" dirty="0"/>
           </a:p>
@@ -5017,7 +5017,7 @@
                   <a:srgbClr val="7A90A8"/>
                 </a:solidFill>
               </a:rPr>
-              <a:t>Understand how the PRD has evolved from a human alignment document to an agent-operationalisable artefact.</a:t>
+              <a:t>Understand how the PRD has evolved from a human alignment document to an agent-operationalisable artifact.</a:t>
             </a:r>
             <a:endParaRPr lang="en-US" sz="1150" dirty="0"/>
           </a:p>
@@ -5550,7 +5550,7 @@
                   <a:srgbClr val="FFFFFF"/>
                 </a:solidFill>
               </a:rPr>
-              <a:t>A human artefact written in isolation — useful for human teams, unusable by agents</a:t>
+              <a:t>A human artifact written in isolation — useful for human teams, unusable by agents</a:t>
             </a:r>
             <a:endParaRPr lang="en-US" sz="1500" dirty="0"/>
           </a:p>
@@ -12093,7 +12093,7 @@
                   <a:srgbClr val="FFFFFF"/>
                 </a:solidFill>
               </a:rPr>
-              <a:t>WHAT EACH ARTEFACT CONTAINS</a:t>
+              <a:t>WHAT EACH ARTIFACT CONTAINS</a:t>
             </a:r>
             <a:endParaRPr lang="en-US" sz="1300" dirty="0"/>
           </a:p>
@@ -12129,7 +12129,7 @@
                   <a:srgbClr val="7A90A8"/>
                 </a:solidFill>
               </a:rPr>
-              <a:t>Each file is agent-generated, human-reviewed — no artefact proceeds without approval</a:t>
+              <a:t>Each file is agent-generated, human-reviewed — no artifact proceeds without approval</a:t>
             </a:r>
             <a:endParaRPr lang="en-US" sz="1200" dirty="0"/>
           </a:p>
